--- a/隐盾安全智能体_项目汇报.pptx
+++ b/隐盾安全智能体_项目汇报.pptx
@@ -7927,7 +7927,7 @@
                 <a:ea typeface="微软雅黑"/>
                 <a:cs typeface="微软雅黑"/>
               </a:rPr>
-              <a:t>随附《评委使用说明》：本地/云端算力两步接入</a:t>
+              <a:t>随附《使用说明》：本地/云端算力两步接入</a:t>
             </a:r>
           </a:p>
         </p:txBody>

--- a/隐盾安全智能体_项目汇报.pptx
+++ b/隐盾安全智能体_项目汇报.pptx
@@ -14117,7 +14117,7 @@
                 <a:ea typeface="微软雅黑"/>
                 <a:cs typeface="微软雅黑"/>
               </a:rPr>
-              <a:t>攻击实验：隐私到底有没有用</a:t>
+              <a:t>隐私防护有效性：攻击实验与结果</a:t>
             </a:r>
           </a:p>
         </p:txBody>

--- a/隐盾安全智能体_项目汇报.pptx
+++ b/隐盾安全智能体_项目汇报.pptx
@@ -9853,7 +9853,7 @@
                           <a:ea typeface="微软雅黑"/>
                           <a:cs typeface="微软雅黑"/>
                         </a:rPr>
-                        <a:t>052f054</a:t>
+                        <a:t>357907f</a:t>
                       </a:r>
                     </a:p>
                   </a:txBody>
@@ -9905,7 +9905,7 @@
                           <a:ea typeface="微软雅黑"/>
                           <a:cs typeface="微软雅黑"/>
                         </a:rPr>
-                        <a:t>052f054</a:t>
+                        <a:t>357907f</a:t>
                       </a:r>
                     </a:p>
                   </a:txBody>
@@ -9957,7 +9957,7 @@
                           <a:ea typeface="微软雅黑"/>
                           <a:cs typeface="微软雅黑"/>
                         </a:rPr>
-                        <a:t>6577cdc</a:t>
+                        <a:t>e17fd83</a:t>
                       </a:r>
                     </a:p>
                   </a:txBody>
@@ -10009,7 +10009,7 @@
                           <a:ea typeface="微软雅黑"/>
                           <a:cs typeface="微软雅黑"/>
                         </a:rPr>
-                        <a:t>052f054</a:t>
+                        <a:t>357907f</a:t>
                       </a:r>
                     </a:p>
                   </a:txBody>
@@ -10061,7 +10061,7 @@
                           <a:ea typeface="微软雅黑"/>
                           <a:cs typeface="微软雅黑"/>
                         </a:rPr>
-                        <a:t>3876638</a:t>
+                        <a:t>a79645c</a:t>
                       </a:r>
                     </a:p>
                   </a:txBody>
@@ -10113,7 +10113,7 @@
                           <a:ea typeface="微软雅黑"/>
                           <a:cs typeface="微软雅黑"/>
                         </a:rPr>
-                        <a:t>3876638</a:t>
+                        <a:t>a79645c</a:t>
                       </a:r>
                     </a:p>
                   </a:txBody>
@@ -10165,7 +10165,7 @@
                           <a:ea typeface="微软雅黑"/>
                           <a:cs typeface="微软雅黑"/>
                         </a:rPr>
-                        <a:t>d59c4eb</a:t>
+                        <a:t>9150bf9</a:t>
                       </a:r>
                     </a:p>
                   </a:txBody>

--- a/隐盾安全智能体_项目汇报.pptx
+++ b/隐盾安全智能体_项目汇报.pptx
@@ -23,6 +23,7 @@
     <p:sldId id="271" r:id="rId22"/>
     <p:sldId id="272" r:id="rId23"/>
     <p:sldId id="273" r:id="rId24"/>
+    <p:sldId id="274" r:id="rId25"/>
   </p:sldIdLst>
   <p:sldSz cx="12191695" cy="6858000" type="screen4x3"/>
   <p:notesSz cx="6858000" cy="9144000"/>
@@ -8241,7 +8242,7 @@
                 <a:ea typeface="微软雅黑"/>
                 <a:cs typeface="微软雅黑"/>
               </a:rPr>
-              <a:t>功能实测</a:t>
+              <a:t>核心创新 · 四</a:t>
             </a:r>
           </a:p>
         </p:txBody>
@@ -8278,7 +8279,7 @@
                 <a:ea typeface="微软雅黑"/>
                 <a:cs typeface="微软雅黑"/>
               </a:rPr>
-              <a:t>全链路演示：脱敏 → 审批 → 写盘 → 还原</a:t>
+              <a:t>脱敏 RAG 知识库 · 实测闭环</a:t>
             </a:r>
           </a:p>
         </p:txBody>
@@ -8291,8 +8292,8 @@
         </p:nvSpPr>
         <p:spPr>
           <a:xfrm>
-            <a:off x="640080" y="1554480"/>
-            <a:ext cx="5029200" cy="4799121"/>
+            <a:off x="640080" y="1691640"/>
+            <a:ext cx="5394960" cy="3972213"/>
           </a:xfrm>
           <a:prstGeom prst="roundRect">
             <a:avLst>
@@ -8338,7 +8339,7 @@
       </p:sp>
       <p:pic>
         <p:nvPicPr>
-          <p:cNvPr id="6" name="Picture 5" descr="02_隐私对话演示.png"/>
+          <p:cNvPr id="6" name="Picture 5" descr="08_知识库入库.png"/>
           <p:cNvPicPr>
             <a:picLocks noChangeAspect="1"/>
           </p:cNvPicPr>
@@ -8352,8 +8353,8 @@
         </p:blipFill>
         <p:spPr>
           <a:xfrm>
-            <a:off x="768096" y="1682495"/>
-            <a:ext cx="4773168" cy="4311804"/>
+            <a:off x="768096" y="1819656"/>
+            <a:ext cx="5138928" cy="3539820"/>
           </a:xfrm>
           <a:prstGeom prst="rect">
             <a:avLst/>
@@ -8368,8 +8369,8 @@
         </p:nvSpPr>
         <p:spPr>
           <a:xfrm>
-            <a:off x="640080" y="6408465"/>
-            <a:ext cx="5029200" cy="365760"/>
+            <a:off x="640080" y="5718717"/>
+            <a:ext cx="5394960" cy="365760"/>
           </a:xfrm>
           <a:prstGeom prst="rect">
             <a:avLst/>
@@ -8392,21 +8393,98 @@
                 <a:ea typeface="微软雅黑"/>
                 <a:cs typeface="微软雅黑"/>
               </a:rPr>
-              <a:t>图 4  实测：模型调用工具、审批放行、文件创建、回复还原</a:t>
-            </a:r>
-          </a:p>
-        </p:txBody>
-      </p:sp>
-      <p:sp>
-        <p:nvSpPr>
-          <p:cNvPr id="8" name="TextBox 7"/>
-          <p:cNvSpPr txBox="1"/>
+              <a:t>① 3 篇文档入库（入库即逐块脱敏），向量库零明文</a:t>
+            </a:r>
+          </a:p>
+        </p:txBody>
+      </p:sp>
+      <p:sp>
+        <p:nvSpPr>
+          <p:cNvPr id="8" name="Rounded Rectangle 7"/>
+          <p:cNvSpPr/>
           <p:nvPr/>
         </p:nvSpPr>
         <p:spPr>
           <a:xfrm>
             <a:off x="6172200" y="1691640"/>
-            <a:ext cx="5394960" cy="3566160"/>
+            <a:ext cx="5394960" cy="3915800"/>
+          </a:xfrm>
+          <a:prstGeom prst="roundRect">
+            <a:avLst>
+              <a:gd name="adj" fmla="val 3000"/>
+            </a:avLst>
+          </a:prstGeom>
+          <a:solidFill>
+            <a:srgbClr val="FFFFFF"/>
+          </a:solidFill>
+          <a:ln>
+            <a:noFill/>
+          </a:ln>
+          <a:effectLst/>
+          <a:effectLst>
+            <a:outerShdw blurRad="101600" dist="25400" dir="5400000" rotWithShape="0">
+              <a:srgbClr val="0B2A1E">
+                <a:alpha val="14000"/>
+              </a:srgbClr>
+            </a:outerShdw>
+          </a:effectLst>
+        </p:spPr>
+        <p:style>
+          <a:lnRef idx="1">
+            <a:schemeClr val="accent1"/>
+          </a:lnRef>
+          <a:fillRef idx="3">
+            <a:schemeClr val="accent1"/>
+          </a:fillRef>
+          <a:effectRef idx="2">
+            <a:schemeClr val="accent1"/>
+          </a:effectRef>
+          <a:fontRef idx="minor">
+            <a:schemeClr val="lt1"/>
+          </a:fontRef>
+        </p:style>
+        <p:txBody>
+          <a:bodyPr rtlCol="0" anchor="ctr"/>
+          <a:lstStyle/>
+          <a:p>
+            <a:pPr algn="ctr"/>
+          </a:p>
+        </p:txBody>
+      </p:sp>
+      <p:pic>
+        <p:nvPicPr>
+          <p:cNvPr id="9" name="Picture 8" descr="08_知识库检索回答.png"/>
+          <p:cNvPicPr>
+            <a:picLocks noChangeAspect="1"/>
+          </p:cNvPicPr>
+          <p:nvPr/>
+        </p:nvPicPr>
+        <p:blipFill>
+          <a:blip r:embed="rId3"/>
+          <a:stretch>
+            <a:fillRect/>
+          </a:stretch>
+        </p:blipFill>
+        <p:spPr>
+          <a:xfrm>
+            <a:off x="6300216" y="1819656"/>
+            <a:ext cx="5138928" cy="3486084"/>
+          </a:xfrm>
+          <a:prstGeom prst="rect">
+            <a:avLst/>
+          </a:prstGeom>
+        </p:spPr>
+      </p:pic>
+      <p:sp>
+        <p:nvSpPr>
+          <p:cNvPr id="10" name="TextBox 9"/>
+          <p:cNvSpPr txBox="1"/>
+          <p:nvPr/>
+        </p:nvSpPr>
+        <p:spPr>
+          <a:xfrm>
+            <a:off x="6172200" y="5662304"/>
+            <a:ext cx="5394960" cy="365760"/>
           </a:xfrm>
           <a:prstGeom prst="rect">
             <a:avLst/>
@@ -8419,34 +8497,57 @@
           </a:bodyPr>
           <a:lstStyle/>
           <a:p>
-            <a:pPr algn="l">
-              <a:spcAft>
-                <a:spcPts val="200"/>
-              </a:spcAft>
-            </a:pPr>
+            <a:pPr algn="ctr"/>
+            <a:r>
+              <a:rPr sz="1150" b="0">
+                <a:solidFill>
+                  <a:srgbClr val="6B7A72"/>
+                </a:solidFill>
+                <a:latin typeface="微软雅黑"/>
+                <a:ea typeface="微软雅黑"/>
+                <a:cs typeface="微软雅黑"/>
+              </a:rPr>
+              <a:t>② 检索命中占位符 → 输出层还原真实值呈现</a:t>
+            </a:r>
+          </a:p>
+        </p:txBody>
+      </p:sp>
+      <p:sp>
+        <p:nvSpPr>
+          <p:cNvPr id="11" name="TextBox 10"/>
+          <p:cNvSpPr txBox="1"/>
+          <p:nvPr/>
+        </p:nvSpPr>
+        <p:spPr>
+          <a:xfrm>
+            <a:off x="640080" y="6263640"/>
+            <a:ext cx="10911535" cy="457200"/>
+          </a:xfrm>
+          <a:prstGeom prst="rect">
+            <a:avLst/>
+          </a:prstGeom>
+          <a:noFill/>
+        </p:spPr>
+        <p:txBody>
+          <a:bodyPr wrap="square" anchor="t" lIns="0" rIns="0" tIns="0" bIns="0">
+            <a:spAutoFit/>
+          </a:bodyPr>
+          <a:lstStyle/>
+          <a:p>
+            <a:pPr algn="l"/>
             <a:r>
               <a:rPr sz="1300" b="1">
                 <a:solidFill>
-                  <a:srgbClr val="6B7A72"/>
-                </a:solidFill>
-                <a:latin typeface="微软雅黑"/>
-                <a:ea typeface="微软雅黑"/>
-                <a:cs typeface="微软雅黑"/>
-              </a:rPr>
-              <a:t>演示指令</a:t>
-            </a:r>
-          </a:p>
-          <a:p>
-            <a:pPr algn="l">
-              <a:lnSpc>
-                <a:spcPct val="115000"/>
-              </a:lnSpc>
-              <a:spcAft>
-                <a:spcPts val="1000"/>
-              </a:spcAft>
-            </a:pPr>
-            <a:r>
-              <a:rPr sz="1400" b="1">
+                  <a:srgbClr val="0E7A4F"/>
+                </a:solidFill>
+                <a:latin typeface="微软雅黑"/>
+                <a:ea typeface="微软雅黑"/>
+                <a:cs typeface="微软雅黑"/>
+              </a:rPr>
+              <a:t>闭环要点：</a:t>
+            </a:r>
+            <a:r>
+              <a:rPr sz="1300" b="0">
                 <a:solidFill>
                   <a:srgbClr val="1A2332"/>
                 </a:solidFill>
@@ -8454,243 +8555,14 @@
                 <a:ea typeface="微软雅黑"/>
                 <a:cs typeface="微软雅黑"/>
               </a:rPr>
-              <a:t>“把客户张伟的手机号/身份证/邮箱保存到 客户信息.txt”</a:t>
-            </a:r>
-          </a:p>
-          <a:p>
-            <a:pPr algn="l">
-              <a:lnSpc>
-                <a:spcPct val="110000"/>
-              </a:lnSpc>
-              <a:spcAft>
-                <a:spcPts val="600"/>
-              </a:spcAft>
-            </a:pPr>
-            <a:r>
-              <a:rPr sz="1500" b="1">
-                <a:solidFill>
-                  <a:srgbClr val="E8590C"/>
-                </a:solidFill>
-                <a:latin typeface="微软雅黑"/>
-                <a:ea typeface="微软雅黑"/>
-                <a:cs typeface="微软雅黑"/>
-              </a:rPr>
-              <a:t>1  </a:t>
-            </a:r>
-            <a:r>
-              <a:rPr sz="1350" b="0">
-                <a:solidFill>
-                  <a:srgbClr val="1A2332"/>
-                </a:solidFill>
-                <a:latin typeface="微软雅黑"/>
-                <a:ea typeface="微软雅黑"/>
-                <a:cs typeface="微软雅黑"/>
-              </a:rPr>
-              <a:t>用户输入含 4 类 PII，网关先脱敏</a:t>
-            </a:r>
-          </a:p>
-          <a:p>
-            <a:pPr algn="l">
-              <a:lnSpc>
-                <a:spcPct val="110000"/>
-              </a:lnSpc>
-              <a:spcAft>
-                <a:spcPts val="600"/>
-              </a:spcAft>
-            </a:pPr>
-            <a:r>
-              <a:rPr sz="1500" b="1">
-                <a:solidFill>
-                  <a:srgbClr val="E8590C"/>
-                </a:solidFill>
-                <a:latin typeface="微软雅黑"/>
-                <a:ea typeface="微软雅黑"/>
-                <a:cs typeface="微软雅黑"/>
-              </a:rPr>
-              <a:t>2  </a:t>
-            </a:r>
-            <a:r>
-              <a:rPr sz="1350" b="0">
-                <a:solidFill>
-                  <a:srgbClr val="1A2332"/>
-                </a:solidFill>
-                <a:latin typeface="微软雅黑"/>
-                <a:ea typeface="微软雅黑"/>
-                <a:cs typeface="微软雅黑"/>
-              </a:rPr>
-              <a:t>云端模型只收到占位符（零明文出网）</a:t>
-            </a:r>
-          </a:p>
-          <a:p>
-            <a:pPr algn="l">
-              <a:lnSpc>
-                <a:spcPct val="110000"/>
-              </a:lnSpc>
-              <a:spcAft>
-                <a:spcPts val="600"/>
-              </a:spcAft>
-            </a:pPr>
-            <a:r>
-              <a:rPr sz="1500" b="1">
-                <a:solidFill>
-                  <a:srgbClr val="E8590C"/>
-                </a:solidFill>
-                <a:latin typeface="微软雅黑"/>
-                <a:ea typeface="微软雅黑"/>
-                <a:cs typeface="微软雅黑"/>
-              </a:rPr>
-              <a:t>3  </a:t>
-            </a:r>
-            <a:r>
-              <a:rPr sz="1350" b="0">
-                <a:solidFill>
-                  <a:srgbClr val="1A2332"/>
-                </a:solidFill>
-                <a:latin typeface="微软雅黑"/>
-                <a:ea typeface="微软雅黑"/>
-                <a:cs typeface="微软雅黑"/>
-              </a:rPr>
-              <a:t>模型自主发起 create_local_file 工具调用</a:t>
-            </a:r>
-          </a:p>
-          <a:p>
-            <a:pPr algn="l">
-              <a:lnSpc>
-                <a:spcPct val="110000"/>
-              </a:lnSpc>
-              <a:spcAft>
-                <a:spcPts val="600"/>
-              </a:spcAft>
-            </a:pPr>
-            <a:r>
-              <a:rPr sz="1500" b="1">
-                <a:solidFill>
-                  <a:srgbClr val="E8590C"/>
-                </a:solidFill>
-                <a:latin typeface="微软雅黑"/>
-                <a:ea typeface="微软雅黑"/>
-                <a:cs typeface="微软雅黑"/>
-              </a:rPr>
-              <a:t>4  </a:t>
-            </a:r>
-            <a:r>
-              <a:rPr sz="1350" b="0">
-                <a:solidFill>
-                  <a:srgbClr val="1A2332"/>
-                </a:solidFill>
-                <a:latin typeface="微软雅黑"/>
-                <a:ea typeface="微软雅黑"/>
-                <a:cs typeface="微软雅黑"/>
-              </a:rPr>
-              <a:t>策略引擎熔断 → 弹出人工审批</a:t>
-            </a:r>
-          </a:p>
-          <a:p>
-            <a:pPr algn="l">
-              <a:lnSpc>
-                <a:spcPct val="110000"/>
-              </a:lnSpc>
-              <a:spcAft>
-                <a:spcPts val="600"/>
-              </a:spcAft>
-            </a:pPr>
-            <a:r>
-              <a:rPr sz="1500" b="1">
-                <a:solidFill>
-                  <a:srgbClr val="E8590C"/>
-                </a:solidFill>
-                <a:latin typeface="微软雅黑"/>
-                <a:ea typeface="微软雅黑"/>
-                <a:cs typeface="微软雅黑"/>
-              </a:rPr>
-              <a:t>5  </a:t>
-            </a:r>
-            <a:r>
-              <a:rPr sz="1350" b="0">
-                <a:solidFill>
-                  <a:srgbClr val="1A2332"/>
-                </a:solidFill>
-                <a:latin typeface="微软雅黑"/>
-                <a:ea typeface="微软雅黑"/>
-                <a:cs typeface="微软雅黑"/>
-              </a:rPr>
-              <a:t>安全员授权 → 沙箱内文件真实创建</a:t>
-            </a:r>
-          </a:p>
-          <a:p>
-            <a:pPr algn="l">
-              <a:lnSpc>
-                <a:spcPct val="110000"/>
-              </a:lnSpc>
-              <a:spcAft>
-                <a:spcPts val="600"/>
-              </a:spcAft>
-            </a:pPr>
-            <a:r>
-              <a:rPr sz="1500" b="1">
-                <a:solidFill>
-                  <a:srgbClr val="E8590C"/>
-                </a:solidFill>
-                <a:latin typeface="微软雅黑"/>
-                <a:ea typeface="微软雅黑"/>
-                <a:cs typeface="微软雅黑"/>
-              </a:rPr>
-              <a:t>6  </a:t>
-            </a:r>
-            <a:r>
-              <a:rPr sz="1350" b="0">
-                <a:solidFill>
-                  <a:srgbClr val="1A2332"/>
-                </a:solidFill>
-                <a:latin typeface="微软雅黑"/>
-                <a:ea typeface="微软雅黑"/>
-                <a:cs typeface="微软雅黑"/>
-              </a:rPr>
-              <a:t>回复中的占位符自动还原明文呈现</a:t>
-            </a:r>
-          </a:p>
-        </p:txBody>
-      </p:sp>
-      <p:sp>
-        <p:nvSpPr>
-          <p:cNvPr id="9" name="TextBox 8"/>
-          <p:cNvSpPr txBox="1"/>
-          <p:nvPr/>
-        </p:nvSpPr>
-        <p:spPr>
-          <a:xfrm>
-            <a:off x="6172200" y="5440680"/>
-            <a:ext cx="5394960" cy="457200"/>
-          </a:xfrm>
-          <a:prstGeom prst="rect">
-            <a:avLst/>
-          </a:prstGeom>
-          <a:noFill/>
-        </p:spPr>
-        <p:txBody>
-          <a:bodyPr wrap="square" anchor="t" lIns="0" rIns="0" tIns="0" bIns="0">
-            <a:spAutoFit/>
-          </a:bodyPr>
-          <a:lstStyle/>
-          <a:p>
-            <a:pPr algn="l"/>
-            <a:r>
-              <a:rPr sz="1250" b="1">
-                <a:solidFill>
-                  <a:srgbClr val="0E7A4F"/>
-                </a:solidFill>
-                <a:latin typeface="微软雅黑"/>
-                <a:ea typeface="微软雅黑"/>
-                <a:cs typeface="微软雅黑"/>
-              </a:rPr>
-              <a:t>磁盘文件逐字校验一致 · 全程审计留痕</a:t>
-            </a:r>
-          </a:p>
-        </p:txBody>
-      </p:sp>
-      <p:sp>
-        <p:nvSpPr>
-          <p:cNvPr id="10" name="TextBox 9"/>
+              <a:t>模型全程只接触占位符；真实值仅在本地输出层还原，云端/向量库/审计均无明文。</a:t>
+            </a:r>
+          </a:p>
+        </p:txBody>
+      </p:sp>
+      <p:sp>
+        <p:nvSpPr>
+          <p:cNvPr id="12" name="TextBox 11"/>
           <p:cNvSpPr txBox="1"/>
           <p:nvPr/>
         </p:nvSpPr>
@@ -8734,6 +8606,584 @@
 </file>
 
 <file path=ppt/slides/slide16.xml><?xml version="1.0" encoding="utf-8"?>
+<p:sld xmlns:a="http://schemas.openxmlformats.org/drawingml/2006/main" xmlns:p="http://schemas.openxmlformats.org/presentationml/2006/main" xmlns:r="http://schemas.openxmlformats.org/officeDocument/2006/relationships">
+  <p:cSld>
+    <p:spTree>
+      <p:nvGrpSpPr>
+        <p:cNvPr id="1" name=""/>
+        <p:cNvGrpSpPr/>
+        <p:nvPr/>
+      </p:nvGrpSpPr>
+      <p:grpSpPr/>
+      <p:sp>
+        <p:nvSpPr>
+          <p:cNvPr id="2" name="Rectangle 1"/>
+          <p:cNvSpPr/>
+          <p:nvPr/>
+        </p:nvSpPr>
+        <p:spPr>
+          <a:xfrm>
+            <a:off x="0" y="0"/>
+            <a:ext cx="12191695" cy="6858000"/>
+          </a:xfrm>
+          <a:prstGeom prst="rect">
+            <a:avLst/>
+          </a:prstGeom>
+          <a:solidFill>
+            <a:srgbClr val="F4F7F5"/>
+          </a:solidFill>
+          <a:ln>
+            <a:noFill/>
+          </a:ln>
+          <a:effectLst/>
+        </p:spPr>
+        <p:style>
+          <a:lnRef idx="1">
+            <a:schemeClr val="accent1"/>
+          </a:lnRef>
+          <a:fillRef idx="3">
+            <a:schemeClr val="accent1"/>
+          </a:fillRef>
+          <a:effectRef idx="2">
+            <a:schemeClr val="accent1"/>
+          </a:effectRef>
+          <a:fontRef idx="minor">
+            <a:schemeClr val="lt1"/>
+          </a:fontRef>
+        </p:style>
+        <p:txBody>
+          <a:bodyPr rtlCol="0" anchor="ctr"/>
+          <a:lstStyle/>
+          <a:p>
+            <a:pPr algn="ctr"/>
+          </a:p>
+        </p:txBody>
+      </p:sp>
+      <p:sp>
+        <p:nvSpPr>
+          <p:cNvPr id="3" name="TextBox 2"/>
+          <p:cNvSpPr txBox="1"/>
+          <p:nvPr/>
+        </p:nvSpPr>
+        <p:spPr>
+          <a:xfrm>
+            <a:off x="640080" y="502920"/>
+            <a:ext cx="7315200" cy="274320"/>
+          </a:xfrm>
+          <a:prstGeom prst="rect">
+            <a:avLst/>
+          </a:prstGeom>
+          <a:noFill/>
+        </p:spPr>
+        <p:txBody>
+          <a:bodyPr wrap="square" anchor="t" lIns="0" rIns="0" tIns="0" bIns="0">
+            <a:spAutoFit/>
+          </a:bodyPr>
+          <a:lstStyle/>
+          <a:p>
+            <a:pPr algn="l"/>
+            <a:r>
+              <a:rPr sz="1300" b="1">
+                <a:solidFill>
+                  <a:srgbClr val="0E7A4F"/>
+                </a:solidFill>
+                <a:latin typeface="微软雅黑"/>
+                <a:ea typeface="微软雅黑"/>
+                <a:cs typeface="微软雅黑"/>
+              </a:rPr>
+              <a:t>功能实测</a:t>
+            </a:r>
+          </a:p>
+        </p:txBody>
+      </p:sp>
+      <p:sp>
+        <p:nvSpPr>
+          <p:cNvPr id="4" name="TextBox 3"/>
+          <p:cNvSpPr txBox="1"/>
+          <p:nvPr/>
+        </p:nvSpPr>
+        <p:spPr>
+          <a:xfrm>
+            <a:off x="640080" y="822960"/>
+            <a:ext cx="10911535" cy="731520"/>
+          </a:xfrm>
+          <a:prstGeom prst="rect">
+            <a:avLst/>
+          </a:prstGeom>
+          <a:noFill/>
+        </p:spPr>
+        <p:txBody>
+          <a:bodyPr wrap="square" anchor="t" lIns="0" rIns="0" tIns="0" bIns="0">
+            <a:spAutoFit/>
+          </a:bodyPr>
+          <a:lstStyle/>
+          <a:p>
+            <a:pPr algn="l"/>
+            <a:r>
+              <a:rPr sz="2700" b="1">
+                <a:solidFill>
+                  <a:srgbClr val="1A2332"/>
+                </a:solidFill>
+                <a:latin typeface="微软雅黑"/>
+                <a:ea typeface="微软雅黑"/>
+                <a:cs typeface="微软雅黑"/>
+              </a:rPr>
+              <a:t>全链路演示：脱敏 → 审批 → 写盘 → 还原</a:t>
+            </a:r>
+          </a:p>
+        </p:txBody>
+      </p:sp>
+      <p:sp>
+        <p:nvSpPr>
+          <p:cNvPr id="5" name="Rounded Rectangle 4"/>
+          <p:cNvSpPr/>
+          <p:nvPr/>
+        </p:nvSpPr>
+        <p:spPr>
+          <a:xfrm>
+            <a:off x="640080" y="1554480"/>
+            <a:ext cx="5029200" cy="4799121"/>
+          </a:xfrm>
+          <a:prstGeom prst="roundRect">
+            <a:avLst>
+              <a:gd name="adj" fmla="val 3000"/>
+            </a:avLst>
+          </a:prstGeom>
+          <a:solidFill>
+            <a:srgbClr val="FFFFFF"/>
+          </a:solidFill>
+          <a:ln>
+            <a:noFill/>
+          </a:ln>
+          <a:effectLst/>
+          <a:effectLst>
+            <a:outerShdw blurRad="101600" dist="25400" dir="5400000" rotWithShape="0">
+              <a:srgbClr val="0B2A1E">
+                <a:alpha val="14000"/>
+              </a:srgbClr>
+            </a:outerShdw>
+          </a:effectLst>
+        </p:spPr>
+        <p:style>
+          <a:lnRef idx="1">
+            <a:schemeClr val="accent1"/>
+          </a:lnRef>
+          <a:fillRef idx="3">
+            <a:schemeClr val="accent1"/>
+          </a:fillRef>
+          <a:effectRef idx="2">
+            <a:schemeClr val="accent1"/>
+          </a:effectRef>
+          <a:fontRef idx="minor">
+            <a:schemeClr val="lt1"/>
+          </a:fontRef>
+        </p:style>
+        <p:txBody>
+          <a:bodyPr rtlCol="0" anchor="ctr"/>
+          <a:lstStyle/>
+          <a:p>
+            <a:pPr algn="ctr"/>
+          </a:p>
+        </p:txBody>
+      </p:sp>
+      <p:pic>
+        <p:nvPicPr>
+          <p:cNvPr id="6" name="Picture 5" descr="02_隐私对话演示.png"/>
+          <p:cNvPicPr>
+            <a:picLocks noChangeAspect="1"/>
+          </p:cNvPicPr>
+          <p:nvPr/>
+        </p:nvPicPr>
+        <p:blipFill>
+          <a:blip r:embed="rId2"/>
+          <a:stretch>
+            <a:fillRect/>
+          </a:stretch>
+        </p:blipFill>
+        <p:spPr>
+          <a:xfrm>
+            <a:off x="768096" y="1682495"/>
+            <a:ext cx="4773168" cy="4311804"/>
+          </a:xfrm>
+          <a:prstGeom prst="rect">
+            <a:avLst/>
+          </a:prstGeom>
+        </p:spPr>
+      </p:pic>
+      <p:sp>
+        <p:nvSpPr>
+          <p:cNvPr id="7" name="TextBox 6"/>
+          <p:cNvSpPr txBox="1"/>
+          <p:nvPr/>
+        </p:nvSpPr>
+        <p:spPr>
+          <a:xfrm>
+            <a:off x="640080" y="6408465"/>
+            <a:ext cx="5029200" cy="365760"/>
+          </a:xfrm>
+          <a:prstGeom prst="rect">
+            <a:avLst/>
+          </a:prstGeom>
+          <a:noFill/>
+        </p:spPr>
+        <p:txBody>
+          <a:bodyPr wrap="square" anchor="t" lIns="0" rIns="0" tIns="0" bIns="0">
+            <a:spAutoFit/>
+          </a:bodyPr>
+          <a:lstStyle/>
+          <a:p>
+            <a:pPr algn="ctr"/>
+            <a:r>
+              <a:rPr sz="1150" b="0">
+                <a:solidFill>
+                  <a:srgbClr val="6B7A72"/>
+                </a:solidFill>
+                <a:latin typeface="微软雅黑"/>
+                <a:ea typeface="微软雅黑"/>
+                <a:cs typeface="微软雅黑"/>
+              </a:rPr>
+              <a:t>图 4  实测：模型调用工具、审批放行、文件创建、回复还原</a:t>
+            </a:r>
+          </a:p>
+        </p:txBody>
+      </p:sp>
+      <p:sp>
+        <p:nvSpPr>
+          <p:cNvPr id="8" name="TextBox 7"/>
+          <p:cNvSpPr txBox="1"/>
+          <p:nvPr/>
+        </p:nvSpPr>
+        <p:spPr>
+          <a:xfrm>
+            <a:off x="6172200" y="1691640"/>
+            <a:ext cx="5394960" cy="3566160"/>
+          </a:xfrm>
+          <a:prstGeom prst="rect">
+            <a:avLst/>
+          </a:prstGeom>
+          <a:noFill/>
+        </p:spPr>
+        <p:txBody>
+          <a:bodyPr wrap="square" anchor="t" lIns="0" rIns="0" tIns="0" bIns="0">
+            <a:spAutoFit/>
+          </a:bodyPr>
+          <a:lstStyle/>
+          <a:p>
+            <a:pPr algn="l">
+              <a:spcAft>
+                <a:spcPts val="200"/>
+              </a:spcAft>
+            </a:pPr>
+            <a:r>
+              <a:rPr sz="1300" b="1">
+                <a:solidFill>
+                  <a:srgbClr val="6B7A72"/>
+                </a:solidFill>
+                <a:latin typeface="微软雅黑"/>
+                <a:ea typeface="微软雅黑"/>
+                <a:cs typeface="微软雅黑"/>
+              </a:rPr>
+              <a:t>演示指令</a:t>
+            </a:r>
+          </a:p>
+          <a:p>
+            <a:pPr algn="l">
+              <a:lnSpc>
+                <a:spcPct val="115000"/>
+              </a:lnSpc>
+              <a:spcAft>
+                <a:spcPts val="1000"/>
+              </a:spcAft>
+            </a:pPr>
+            <a:r>
+              <a:rPr sz="1400" b="1">
+                <a:solidFill>
+                  <a:srgbClr val="1A2332"/>
+                </a:solidFill>
+                <a:latin typeface="微软雅黑"/>
+                <a:ea typeface="微软雅黑"/>
+                <a:cs typeface="微软雅黑"/>
+              </a:rPr>
+              <a:t>“把客户张伟的手机号/身份证/邮箱保存到 客户信息.txt”</a:t>
+            </a:r>
+          </a:p>
+          <a:p>
+            <a:pPr algn="l">
+              <a:lnSpc>
+                <a:spcPct val="110000"/>
+              </a:lnSpc>
+              <a:spcAft>
+                <a:spcPts val="600"/>
+              </a:spcAft>
+            </a:pPr>
+            <a:r>
+              <a:rPr sz="1500" b="1">
+                <a:solidFill>
+                  <a:srgbClr val="E8590C"/>
+                </a:solidFill>
+                <a:latin typeface="微软雅黑"/>
+                <a:ea typeface="微软雅黑"/>
+                <a:cs typeface="微软雅黑"/>
+              </a:rPr>
+              <a:t>1  </a:t>
+            </a:r>
+            <a:r>
+              <a:rPr sz="1350" b="0">
+                <a:solidFill>
+                  <a:srgbClr val="1A2332"/>
+                </a:solidFill>
+                <a:latin typeface="微软雅黑"/>
+                <a:ea typeface="微软雅黑"/>
+                <a:cs typeface="微软雅黑"/>
+              </a:rPr>
+              <a:t>用户输入含 4 类 PII，网关先脱敏</a:t>
+            </a:r>
+          </a:p>
+          <a:p>
+            <a:pPr algn="l">
+              <a:lnSpc>
+                <a:spcPct val="110000"/>
+              </a:lnSpc>
+              <a:spcAft>
+                <a:spcPts val="600"/>
+              </a:spcAft>
+            </a:pPr>
+            <a:r>
+              <a:rPr sz="1500" b="1">
+                <a:solidFill>
+                  <a:srgbClr val="E8590C"/>
+                </a:solidFill>
+                <a:latin typeface="微软雅黑"/>
+                <a:ea typeface="微软雅黑"/>
+                <a:cs typeface="微软雅黑"/>
+              </a:rPr>
+              <a:t>2  </a:t>
+            </a:r>
+            <a:r>
+              <a:rPr sz="1350" b="0">
+                <a:solidFill>
+                  <a:srgbClr val="1A2332"/>
+                </a:solidFill>
+                <a:latin typeface="微软雅黑"/>
+                <a:ea typeface="微软雅黑"/>
+                <a:cs typeface="微软雅黑"/>
+              </a:rPr>
+              <a:t>云端模型只收到占位符（零明文出网）</a:t>
+            </a:r>
+          </a:p>
+          <a:p>
+            <a:pPr algn="l">
+              <a:lnSpc>
+                <a:spcPct val="110000"/>
+              </a:lnSpc>
+              <a:spcAft>
+                <a:spcPts val="600"/>
+              </a:spcAft>
+            </a:pPr>
+            <a:r>
+              <a:rPr sz="1500" b="1">
+                <a:solidFill>
+                  <a:srgbClr val="E8590C"/>
+                </a:solidFill>
+                <a:latin typeface="微软雅黑"/>
+                <a:ea typeface="微软雅黑"/>
+                <a:cs typeface="微软雅黑"/>
+              </a:rPr>
+              <a:t>3  </a:t>
+            </a:r>
+            <a:r>
+              <a:rPr sz="1350" b="0">
+                <a:solidFill>
+                  <a:srgbClr val="1A2332"/>
+                </a:solidFill>
+                <a:latin typeface="微软雅黑"/>
+                <a:ea typeface="微软雅黑"/>
+                <a:cs typeface="微软雅黑"/>
+              </a:rPr>
+              <a:t>模型自主发起 create_local_file 工具调用</a:t>
+            </a:r>
+          </a:p>
+          <a:p>
+            <a:pPr algn="l">
+              <a:lnSpc>
+                <a:spcPct val="110000"/>
+              </a:lnSpc>
+              <a:spcAft>
+                <a:spcPts val="600"/>
+              </a:spcAft>
+            </a:pPr>
+            <a:r>
+              <a:rPr sz="1500" b="1">
+                <a:solidFill>
+                  <a:srgbClr val="E8590C"/>
+                </a:solidFill>
+                <a:latin typeface="微软雅黑"/>
+                <a:ea typeface="微软雅黑"/>
+                <a:cs typeface="微软雅黑"/>
+              </a:rPr>
+              <a:t>4  </a:t>
+            </a:r>
+            <a:r>
+              <a:rPr sz="1350" b="0">
+                <a:solidFill>
+                  <a:srgbClr val="1A2332"/>
+                </a:solidFill>
+                <a:latin typeface="微软雅黑"/>
+                <a:ea typeface="微软雅黑"/>
+                <a:cs typeface="微软雅黑"/>
+              </a:rPr>
+              <a:t>策略引擎熔断 → 弹出人工审批</a:t>
+            </a:r>
+          </a:p>
+          <a:p>
+            <a:pPr algn="l">
+              <a:lnSpc>
+                <a:spcPct val="110000"/>
+              </a:lnSpc>
+              <a:spcAft>
+                <a:spcPts val="600"/>
+              </a:spcAft>
+            </a:pPr>
+            <a:r>
+              <a:rPr sz="1500" b="1">
+                <a:solidFill>
+                  <a:srgbClr val="E8590C"/>
+                </a:solidFill>
+                <a:latin typeface="微软雅黑"/>
+                <a:ea typeface="微软雅黑"/>
+                <a:cs typeface="微软雅黑"/>
+              </a:rPr>
+              <a:t>5  </a:t>
+            </a:r>
+            <a:r>
+              <a:rPr sz="1350" b="0">
+                <a:solidFill>
+                  <a:srgbClr val="1A2332"/>
+                </a:solidFill>
+                <a:latin typeface="微软雅黑"/>
+                <a:ea typeface="微软雅黑"/>
+                <a:cs typeface="微软雅黑"/>
+              </a:rPr>
+              <a:t>安全员授权 → 沙箱内文件真实创建</a:t>
+            </a:r>
+          </a:p>
+          <a:p>
+            <a:pPr algn="l">
+              <a:lnSpc>
+                <a:spcPct val="110000"/>
+              </a:lnSpc>
+              <a:spcAft>
+                <a:spcPts val="600"/>
+              </a:spcAft>
+            </a:pPr>
+            <a:r>
+              <a:rPr sz="1500" b="1">
+                <a:solidFill>
+                  <a:srgbClr val="E8590C"/>
+                </a:solidFill>
+                <a:latin typeface="微软雅黑"/>
+                <a:ea typeface="微软雅黑"/>
+                <a:cs typeface="微软雅黑"/>
+              </a:rPr>
+              <a:t>6  </a:t>
+            </a:r>
+            <a:r>
+              <a:rPr sz="1350" b="0">
+                <a:solidFill>
+                  <a:srgbClr val="1A2332"/>
+                </a:solidFill>
+                <a:latin typeface="微软雅黑"/>
+                <a:ea typeface="微软雅黑"/>
+                <a:cs typeface="微软雅黑"/>
+              </a:rPr>
+              <a:t>回复中的占位符自动还原明文呈现</a:t>
+            </a:r>
+          </a:p>
+        </p:txBody>
+      </p:sp>
+      <p:sp>
+        <p:nvSpPr>
+          <p:cNvPr id="9" name="TextBox 8"/>
+          <p:cNvSpPr txBox="1"/>
+          <p:nvPr/>
+        </p:nvSpPr>
+        <p:spPr>
+          <a:xfrm>
+            <a:off x="6172200" y="5440680"/>
+            <a:ext cx="5394960" cy="457200"/>
+          </a:xfrm>
+          <a:prstGeom prst="rect">
+            <a:avLst/>
+          </a:prstGeom>
+          <a:noFill/>
+        </p:spPr>
+        <p:txBody>
+          <a:bodyPr wrap="square" anchor="t" lIns="0" rIns="0" tIns="0" bIns="0">
+            <a:spAutoFit/>
+          </a:bodyPr>
+          <a:lstStyle/>
+          <a:p>
+            <a:pPr algn="l"/>
+            <a:r>
+              <a:rPr sz="1250" b="1">
+                <a:solidFill>
+                  <a:srgbClr val="0E7A4F"/>
+                </a:solidFill>
+                <a:latin typeface="微软雅黑"/>
+                <a:ea typeface="微软雅黑"/>
+                <a:cs typeface="微软雅黑"/>
+              </a:rPr>
+              <a:t>磁盘文件逐字校验一致 · 全程审计留痕</a:t>
+            </a:r>
+          </a:p>
+        </p:txBody>
+      </p:sp>
+      <p:sp>
+        <p:nvSpPr>
+          <p:cNvPr id="10" name="TextBox 9"/>
+          <p:cNvSpPr txBox="1"/>
+          <p:nvPr/>
+        </p:nvSpPr>
+        <p:spPr>
+          <a:xfrm>
+            <a:off x="11185855" y="6291072"/>
+            <a:ext cx="548640" cy="320040"/>
+          </a:xfrm>
+          <a:prstGeom prst="rect">
+            <a:avLst/>
+          </a:prstGeom>
+          <a:noFill/>
+        </p:spPr>
+        <p:txBody>
+          <a:bodyPr wrap="square" anchor="t" lIns="0" rIns="0" tIns="0" bIns="0">
+            <a:spAutoFit/>
+          </a:bodyPr>
+          <a:lstStyle/>
+          <a:p>
+            <a:pPr algn="r"/>
+            <a:r>
+              <a:rPr sz="1100" b="0">
+                <a:solidFill>
+                  <a:srgbClr val="6B7A72"/>
+                </a:solidFill>
+                <a:latin typeface="微软雅黑"/>
+                <a:ea typeface="微软雅黑"/>
+                <a:cs typeface="微软雅黑"/>
+              </a:rPr>
+              <a:t>16</a:t>
+            </a:r>
+          </a:p>
+        </p:txBody>
+      </p:sp>
+    </p:spTree>
+  </p:cSld>
+  <p:clrMapOvr>
+    <a:masterClrMapping/>
+  </p:clrMapOvr>
+</p:sld>
+</file>
+
+<file path=ppt/slides/slide17.xml><?xml version="1.0" encoding="utf-8"?>
 <p:sld xmlns:a="http://schemas.openxmlformats.org/drawingml/2006/main" xmlns:p="http://schemas.openxmlformats.org/presentationml/2006/main" xmlns:r="http://schemas.openxmlformats.org/officeDocument/2006/relationships">
   <p:cSld>
     <p:spTree>
@@ -10264,7 +10714,7 @@
                 <a:ea typeface="微软雅黑"/>
                 <a:cs typeface="微软雅黑"/>
               </a:rPr>
-              <a:t>16</a:t>
+              <a:t>17</a:t>
             </a:r>
           </a:p>
         </p:txBody>
@@ -10277,7 +10727,7 @@
 </p:sld>
 </file>
 
-<file path=ppt/slides/slide17.xml><?xml version="1.0" encoding="utf-8"?>
+<file path=ppt/slides/slide18.xml><?xml version="1.0" encoding="utf-8"?>
 <p:sld xmlns:a="http://schemas.openxmlformats.org/drawingml/2006/main" xmlns:p="http://schemas.openxmlformats.org/presentationml/2006/main" xmlns:r="http://schemas.openxmlformats.org/officeDocument/2006/relationships">
   <p:cSld>
     <p:spTree>
@@ -11581,7 +12031,7 @@
                 <a:ea typeface="微软雅黑"/>
                 <a:cs typeface="微软雅黑"/>
               </a:rPr>
-              <a:t>17</a:t>
+              <a:t>18</a:t>
             </a:r>
           </a:p>
         </p:txBody>
@@ -11594,7 +12044,7 @@
 </p:sld>
 </file>
 
-<file path=ppt/slides/slide18.xml><?xml version="1.0" encoding="utf-8"?>
+<file path=ppt/slides/slide19.xml><?xml version="1.0" encoding="utf-8"?>
 <p:sld xmlns:a="http://schemas.openxmlformats.org/drawingml/2006/main" xmlns:p="http://schemas.openxmlformats.org/presentationml/2006/main" xmlns:r="http://schemas.openxmlformats.org/officeDocument/2006/relationships">
   <p:cSld>
     <p:spTree>

--- a/隐盾安全智能体_项目汇报.pptx
+++ b/隐盾安全智能体_项目汇报.pptx
@@ -5477,7 +5477,7 @@
                 <a:ea typeface="微软雅黑"/>
                 <a:cs typeface="微软雅黑"/>
               </a:rPr>
-              <a:t>shlex 解析 + shell=False，去注入</a:t>
+              <a:t>shlex + shell=False + 子命令级校验（封堵内联代码/安装入口）</a:t>
             </a:r>
           </a:p>
         </p:txBody>
@@ -5828,6 +5828,35 @@
                 <a:cs typeface="微软雅黑"/>
               </a:rPr>
               <a:t>tasklist 不在白名单 → 拒绝执行</a:t>
+            </a:r>
+          </a:p>
+          <a:p>
+            <a:pPr algn="l">
+              <a:spcAft>
+                <a:spcPts val="300"/>
+              </a:spcAft>
+            </a:pPr>
+            <a:r>
+              <a:rPr sz="1350" b="1">
+                <a:solidFill>
+                  <a:srgbClr val="0E7A4F"/>
+                </a:solidFill>
+                <a:latin typeface="微软雅黑"/>
+                <a:ea typeface="微软雅黑"/>
+                <a:cs typeface="微软雅黑"/>
+              </a:rPr>
+              <a:t>✓  </a:t>
+            </a:r>
+            <a:r>
+              <a:rPr sz="1350" b="0">
+                <a:solidFill>
+                  <a:srgbClr val="1A2332"/>
+                </a:solidFill>
+                <a:latin typeface="微软雅黑"/>
+                <a:ea typeface="微软雅黑"/>
+                <a:cs typeface="微软雅黑"/>
+              </a:rPr>
+              <a:t>python -c 内联代码 / pip install → 子命令级拒绝</a:t>
             </a:r>
           </a:p>
           <a:p>
@@ -6174,7 +6203,7 @@
                 <a:ea typeface="微软雅黑"/>
                 <a:cs typeface="微软雅黑"/>
               </a:rPr>
-              <a:t>   弹窗展示申请工具与目标路径，杜绝“盲批”</a:t>
+              <a:t>   弹窗展示申请工具、目标路径与即将执行的命令/写入内容，杜绝“盲批”</a:t>
             </a:r>
           </a:p>
           <a:p>
@@ -6330,7 +6359,7 @@
       </p:sp>
       <p:pic>
         <p:nvPicPr>
-          <p:cNvPr id="7" name="Picture 6" descr="05_高危操作审批弹窗.png"/>
+          <p:cNvPr id="7" name="Picture 6" descr="05b_审批弹窗_含待审内容.png"/>
           <p:cNvPicPr>
             <a:picLocks noChangeAspect="1"/>
           </p:cNvPicPr>
@@ -6384,7 +6413,7 @@
                 <a:ea typeface="微软雅黑"/>
                 <a:cs typeface="微软雅黑"/>
               </a:rPr>
-              <a:t>图 2  隐盾安全决策网关拦截弹窗（实测）</a:t>
+              <a:t>图 2  隐盾安全决策网关拦截弹窗（含待审命令/内容）</a:t>
             </a:r>
           </a:p>
         </p:txBody>
@@ -9509,25 +9538,7 @@
                 <a:ea typeface="微软雅黑"/>
                 <a:cs typeface="微软雅黑"/>
               </a:rPr>
-              <a:t>20+ 攻击用例动态验证</a:t>
-            </a:r>
-          </a:p>
-          <a:p>
-            <a:pPr algn="l">
-              <a:lnSpc>
-                <a:spcPct val="105000"/>
-              </a:lnSpc>
-            </a:pPr>
-            <a:r>
-              <a:rPr sz="1200" b="0">
-                <a:solidFill>
-                  <a:srgbClr val="6B7A72"/>
-                </a:solidFill>
-                <a:latin typeface="微软雅黑"/>
-                <a:ea typeface="微软雅黑"/>
-                <a:cs typeface="微软雅黑"/>
-              </a:rPr>
-              <a:t>通读 15 个核心模块</a:t>
+              <a:t>两轮红队：动态攻击验证 + 通读 15 个核心模块</a:t>
             </a:r>
           </a:p>
         </p:txBody>
@@ -9748,7 +9759,7 @@
                 <a:ea typeface="微软雅黑"/>
                 <a:cs typeface="微软雅黑"/>
               </a:rPr>
-              <a:t>含复现证据</a:t>
+              <a:t>含可复现证据</a:t>
             </a:r>
           </a:p>
         </p:txBody>
@@ -9951,7 +9962,7 @@
                 <a:ea typeface="微软雅黑"/>
                 <a:cs typeface="微软雅黑"/>
               </a:rPr>
-              <a:t>15 项修复</a:t>
+              <a:t>20+ 项修复</a:t>
             </a:r>
           </a:p>
           <a:p>
@@ -10887,7 +10898,7 @@
                 <a:ea typeface="微软雅黑"/>
                 <a:cs typeface="微软雅黑"/>
               </a:rPr>
-              <a:t>5 个测试套件 · 40+ 断言 · 全量通过</a:t>
+              <a:t>8 个测试套件 · 全部通过（含攻防评测 9 项实验）</a:t>
             </a:r>
           </a:p>
         </p:txBody>
@@ -10900,8 +10911,8 @@
         </p:nvSpPr>
         <p:spPr>
           <a:xfrm>
-            <a:off x="640080" y="2148840"/>
-            <a:ext cx="5486400" cy="658368"/>
+            <a:off x="640080" y="2103120"/>
+            <a:ext cx="5486400" cy="603504"/>
           </a:xfrm>
           <a:prstGeom prst="roundRect">
             <a:avLst>
@@ -10946,8 +10957,8 @@
         </p:nvSpPr>
         <p:spPr>
           <a:xfrm>
-            <a:off x="914400" y="2148840"/>
-            <a:ext cx="2194560" cy="658368"/>
+            <a:off x="914400" y="2103120"/>
+            <a:ext cx="2194560" cy="603504"/>
           </a:xfrm>
           <a:prstGeom prst="rect">
             <a:avLst/>
@@ -10962,7 +10973,7 @@
           <a:p>
             <a:pPr algn="l"/>
             <a:r>
-              <a:rPr sz="1450" b="1">
+              <a:rPr sz="1400" b="1">
                 <a:solidFill>
                   <a:srgbClr val="1A2332"/>
                 </a:solidFill>
@@ -10983,8 +10994,8 @@
         </p:nvSpPr>
         <p:spPr>
           <a:xfrm>
-            <a:off x="3154680" y="2148840"/>
-            <a:ext cx="2468880" cy="658368"/>
+            <a:off x="3154680" y="2103120"/>
+            <a:ext cx="2468880" cy="603504"/>
           </a:xfrm>
           <a:prstGeom prst="rect">
             <a:avLst/>
@@ -11020,8 +11031,8 @@
         </p:nvSpPr>
         <p:spPr>
           <a:xfrm>
-            <a:off x="5577840" y="2148840"/>
-            <a:ext cx="457200" cy="658368"/>
+            <a:off x="5577840" y="2103120"/>
+            <a:ext cx="457200" cy="603504"/>
           </a:xfrm>
           <a:prstGeom prst="rect">
             <a:avLst/>
@@ -11057,8 +11068,8 @@
         </p:nvSpPr>
         <p:spPr>
           <a:xfrm>
-            <a:off x="640080" y="2935224"/>
-            <a:ext cx="5486400" cy="658368"/>
+            <a:off x="640080" y="2788920"/>
+            <a:ext cx="5486400" cy="603504"/>
           </a:xfrm>
           <a:prstGeom prst="roundRect">
             <a:avLst>
@@ -11103,8 +11114,8 @@
         </p:nvSpPr>
         <p:spPr>
           <a:xfrm>
-            <a:off x="914400" y="2935224"/>
-            <a:ext cx="2194560" cy="658368"/>
+            <a:off x="914400" y="2788920"/>
+            <a:ext cx="2194560" cy="603504"/>
           </a:xfrm>
           <a:prstGeom prst="rect">
             <a:avLst/>
@@ -11119,7 +11130,7 @@
           <a:p>
             <a:pPr algn="l"/>
             <a:r>
-              <a:rPr sz="1450" b="1">
+              <a:rPr sz="1400" b="1">
                 <a:solidFill>
                   <a:srgbClr val="1A2332"/>
                 </a:solidFill>
@@ -11140,8 +11151,8 @@
         </p:nvSpPr>
         <p:spPr>
           <a:xfrm>
-            <a:off x="3154680" y="2935224"/>
-            <a:ext cx="2468880" cy="658368"/>
+            <a:off x="3154680" y="2788920"/>
+            <a:ext cx="2468880" cy="603504"/>
           </a:xfrm>
           <a:prstGeom prst="rect">
             <a:avLst/>
@@ -11164,7 +11175,7 @@
                 <a:ea typeface="微软雅黑"/>
                 <a:cs typeface="微软雅黑"/>
               </a:rPr>
-              <a:t>哈希链/防篡改/调用一致性 14/14</a:t>
+              <a:t>哈希链/防篡改/一致性 14/14</a:t>
             </a:r>
           </a:p>
         </p:txBody>
@@ -11177,8 +11188,8 @@
         </p:nvSpPr>
         <p:spPr>
           <a:xfrm>
-            <a:off x="5577840" y="2935224"/>
-            <a:ext cx="457200" cy="658368"/>
+            <a:off x="5577840" y="2788920"/>
+            <a:ext cx="457200" cy="603504"/>
           </a:xfrm>
           <a:prstGeom prst="rect">
             <a:avLst/>
@@ -11214,8 +11225,8 @@
         </p:nvSpPr>
         <p:spPr>
           <a:xfrm>
-            <a:off x="640080" y="3721608"/>
-            <a:ext cx="5486400" cy="658368"/>
+            <a:off x="640080" y="3474720"/>
+            <a:ext cx="5486400" cy="603504"/>
           </a:xfrm>
           <a:prstGeom prst="roundRect">
             <a:avLst>
@@ -11260,8 +11271,8 @@
         </p:nvSpPr>
         <p:spPr>
           <a:xfrm>
-            <a:off x="914400" y="3721608"/>
-            <a:ext cx="2194560" cy="658368"/>
+            <a:off x="914400" y="3474720"/>
+            <a:ext cx="2194560" cy="603504"/>
           </a:xfrm>
           <a:prstGeom prst="rect">
             <a:avLst/>
@@ -11276,7 +11287,7 @@
           <a:p>
             <a:pPr algn="l"/>
             <a:r>
-              <a:rPr sz="1450" b="1">
+              <a:rPr sz="1400" b="1">
                 <a:solidFill>
                   <a:srgbClr val="1A2332"/>
                 </a:solidFill>
@@ -11297,8 +11308,8 @@
         </p:nvSpPr>
         <p:spPr>
           <a:xfrm>
-            <a:off x="3154680" y="3721608"/>
-            <a:ext cx="2468880" cy="658368"/>
+            <a:off x="3154680" y="3474720"/>
+            <a:ext cx="2468880" cy="603504"/>
           </a:xfrm>
           <a:prstGeom prst="rect">
             <a:avLst/>
@@ -11334,8 +11345,8 @@
         </p:nvSpPr>
         <p:spPr>
           <a:xfrm>
-            <a:off x="5577840" y="3721608"/>
-            <a:ext cx="457200" cy="658368"/>
+            <a:off x="5577840" y="3474720"/>
+            <a:ext cx="457200" cy="603504"/>
           </a:xfrm>
           <a:prstGeom prst="rect">
             <a:avLst/>
@@ -11371,8 +11382,8 @@
         </p:nvSpPr>
         <p:spPr>
           <a:xfrm>
-            <a:off x="640080" y="4507992"/>
-            <a:ext cx="5486400" cy="658368"/>
+            <a:off x="640080" y="4160520"/>
+            <a:ext cx="5486400" cy="603504"/>
           </a:xfrm>
           <a:prstGeom prst="roundRect">
             <a:avLst>
@@ -11417,8 +11428,8 @@
         </p:nvSpPr>
         <p:spPr>
           <a:xfrm>
-            <a:off x="914400" y="4507992"/>
-            <a:ext cx="2194560" cy="658368"/>
+            <a:off x="914400" y="4160520"/>
+            <a:ext cx="2194560" cy="603504"/>
           </a:xfrm>
           <a:prstGeom prst="rect">
             <a:avLst/>
@@ -11433,7 +11444,7 @@
           <a:p>
             <a:pPr algn="l"/>
             <a:r>
-              <a:rPr sz="1450" b="1">
+              <a:rPr sz="1400" b="1">
                 <a:solidFill>
                   <a:srgbClr val="1A2332"/>
                 </a:solidFill>
@@ -11441,7 +11452,7 @@
                 <a:ea typeface="微软雅黑"/>
                 <a:cs typeface="微软雅黑"/>
               </a:rPr>
-              <a:t>工作流引擎</a:t>
+              <a:t>工作流 + 知识库</a:t>
             </a:r>
           </a:p>
         </p:txBody>
@@ -11454,8 +11465,8 @@
         </p:nvSpPr>
         <p:spPr>
           <a:xfrm>
-            <a:off x="3154680" y="4507992"/>
-            <a:ext cx="2468880" cy="658368"/>
+            <a:off x="3154680" y="4160520"/>
+            <a:ext cx="2468880" cy="603504"/>
           </a:xfrm>
           <a:prstGeom prst="rect">
             <a:avLst/>
@@ -11478,7 +11489,7 @@
                 <a:ea typeface="微软雅黑"/>
                 <a:cs typeface="微软雅黑"/>
               </a:rPr>
-              <a:t>执行/审批链/自定义/导出</a:t>
+              <a:t>执行/审批链/导出；入库检索零明文</a:t>
             </a:r>
           </a:p>
         </p:txBody>
@@ -11491,8 +11502,8 @@
         </p:nvSpPr>
         <p:spPr>
           <a:xfrm>
-            <a:off x="5577840" y="4507992"/>
-            <a:ext cx="457200" cy="658368"/>
+            <a:off x="5577840" y="4160520"/>
+            <a:ext cx="457200" cy="603504"/>
           </a:xfrm>
           <a:prstGeom prst="rect">
             <a:avLst/>
@@ -11528,8 +11539,8 @@
         </p:nvSpPr>
         <p:spPr>
           <a:xfrm>
-            <a:off x="640080" y="5294376"/>
-            <a:ext cx="5486400" cy="658368"/>
+            <a:off x="640080" y="4846320"/>
+            <a:ext cx="5486400" cy="603504"/>
           </a:xfrm>
           <a:prstGeom prst="roundRect">
             <a:avLst>
@@ -11574,8 +11585,8 @@
         </p:nvSpPr>
         <p:spPr>
           <a:xfrm>
-            <a:off x="914400" y="5294376"/>
-            <a:ext cx="2194560" cy="658368"/>
+            <a:off x="914400" y="4846320"/>
+            <a:ext cx="2194560" cy="603504"/>
           </a:xfrm>
           <a:prstGeom prst="rect">
             <a:avLst/>
@@ -11590,7 +11601,7 @@
           <a:p>
             <a:pPr algn="l"/>
             <a:r>
-              <a:rPr sz="1450" b="1">
+              <a:rPr sz="1400" b="1">
                 <a:solidFill>
                   <a:srgbClr val="1A2332"/>
                 </a:solidFill>
@@ -11598,7 +11609,7 @@
                 <a:ea typeface="微软雅黑"/>
                 <a:cs typeface="微软雅黑"/>
               </a:rPr>
-              <a:t>知识库管线</a:t>
+              <a:t>白名单（新增）</a:t>
             </a:r>
           </a:p>
         </p:txBody>
@@ -11611,8 +11622,8 @@
         </p:nvSpPr>
         <p:spPr>
           <a:xfrm>
-            <a:off x="3154680" y="5294376"/>
-            <a:ext cx="2468880" cy="658368"/>
+            <a:off x="3154680" y="4846320"/>
+            <a:ext cx="2468880" cy="603504"/>
           </a:xfrm>
           <a:prstGeom prst="rect">
             <a:avLst/>
@@ -11635,7 +11646,7 @@
                 <a:ea typeface="微软雅黑"/>
                 <a:cs typeface="微软雅黑"/>
               </a:rPr>
-              <a:t>入库/检索/向量库零明文验证</a:t>
+              <a:t>16 项高危入口全拦截</a:t>
             </a:r>
           </a:p>
         </p:txBody>
@@ -11648,8 +11659,8 @@
         </p:nvSpPr>
         <p:spPr>
           <a:xfrm>
-            <a:off x="5577840" y="5294376"/>
-            <a:ext cx="457200" cy="658368"/>
+            <a:off x="5577840" y="4846320"/>
+            <a:ext cx="457200" cy="603504"/>
           </a:xfrm>
           <a:prstGeom prst="rect">
             <a:avLst/>
@@ -11680,6 +11691,163 @@
       <p:sp>
         <p:nvSpPr>
           <p:cNvPr id="26" name="Rounded Rectangle 25"/>
+          <p:cNvSpPr/>
+          <p:nvPr/>
+        </p:nvSpPr>
+        <p:spPr>
+          <a:xfrm>
+            <a:off x="640080" y="5532120"/>
+            <a:ext cx="5486400" cy="603504"/>
+          </a:xfrm>
+          <a:prstGeom prst="roundRect">
+            <a:avLst>
+              <a:gd name="adj" fmla="val 10000"/>
+            </a:avLst>
+          </a:prstGeom>
+          <a:solidFill>
+            <a:srgbClr val="FFFFFF"/>
+          </a:solidFill>
+          <a:ln>
+            <a:noFill/>
+          </a:ln>
+          <a:effectLst/>
+        </p:spPr>
+        <p:style>
+          <a:lnRef idx="1">
+            <a:schemeClr val="accent1"/>
+          </a:lnRef>
+          <a:fillRef idx="3">
+            <a:schemeClr val="accent1"/>
+          </a:fillRef>
+          <a:effectRef idx="2">
+            <a:schemeClr val="accent1"/>
+          </a:effectRef>
+          <a:fontRef idx="minor">
+            <a:schemeClr val="lt1"/>
+          </a:fontRef>
+        </p:style>
+        <p:txBody>
+          <a:bodyPr rtlCol="0" anchor="ctr"/>
+          <a:lstStyle/>
+          <a:p>
+            <a:pPr algn="ctr"/>
+          </a:p>
+        </p:txBody>
+      </p:sp>
+      <p:sp>
+        <p:nvSpPr>
+          <p:cNvPr id="27" name="TextBox 26"/>
+          <p:cNvSpPr txBox="1"/>
+          <p:nvPr/>
+        </p:nvSpPr>
+        <p:spPr>
+          <a:xfrm>
+            <a:off x="914400" y="5532120"/>
+            <a:ext cx="2194560" cy="603504"/>
+          </a:xfrm>
+          <a:prstGeom prst="rect">
+            <a:avLst/>
+          </a:prstGeom>
+          <a:noFill/>
+        </p:spPr>
+        <p:txBody>
+          <a:bodyPr wrap="square" anchor="ctr" lIns="0" rIns="0" tIns="0" bIns="0">
+            <a:spAutoFit/>
+          </a:bodyPr>
+          <a:lstStyle/>
+          <a:p>
+            <a:pPr algn="l"/>
+            <a:r>
+              <a:rPr sz="1400" b="1">
+                <a:solidFill>
+                  <a:srgbClr val="1A2332"/>
+                </a:solidFill>
+                <a:latin typeface="微软雅黑"/>
+                <a:ea typeface="微软雅黑"/>
+                <a:cs typeface="微软雅黑"/>
+              </a:rPr>
+              <a:t>取消 + 回归（新增）</a:t>
+            </a:r>
+          </a:p>
+        </p:txBody>
+      </p:sp>
+      <p:sp>
+        <p:nvSpPr>
+          <p:cNvPr id="28" name="TextBox 27"/>
+          <p:cNvSpPr txBox="1"/>
+          <p:nvPr/>
+        </p:nvSpPr>
+        <p:spPr>
+          <a:xfrm>
+            <a:off x="3154680" y="5532120"/>
+            <a:ext cx="2468880" cy="603504"/>
+          </a:xfrm>
+          <a:prstGeom prst="rect">
+            <a:avLst/>
+          </a:prstGeom>
+          <a:noFill/>
+        </p:spPr>
+        <p:txBody>
+          <a:bodyPr wrap="square" anchor="ctr" lIns="0" rIns="0" tIns="0" bIns="0">
+            <a:spAutoFit/>
+          </a:bodyPr>
+          <a:lstStyle/>
+          <a:p>
+            <a:pPr algn="l"/>
+            <a:r>
+              <a:rPr sz="1150" b="0">
+                <a:solidFill>
+                  <a:srgbClr val="6B7A72"/>
+                </a:solidFill>
+                <a:latin typeface="微软雅黑"/>
+                <a:ea typeface="微软雅黑"/>
+                <a:cs typeface="微软雅黑"/>
+              </a:rPr>
+              <a:t>取消 0.33s 返回；泄露 0 / 误伤 0</a:t>
+            </a:r>
+          </a:p>
+        </p:txBody>
+      </p:sp>
+      <p:sp>
+        <p:nvSpPr>
+          <p:cNvPr id="29" name="TextBox 28"/>
+          <p:cNvSpPr txBox="1"/>
+          <p:nvPr/>
+        </p:nvSpPr>
+        <p:spPr>
+          <a:xfrm>
+            <a:off x="5577840" y="5532120"/>
+            <a:ext cx="457200" cy="603504"/>
+          </a:xfrm>
+          <a:prstGeom prst="rect">
+            <a:avLst/>
+          </a:prstGeom>
+          <a:noFill/>
+        </p:spPr>
+        <p:txBody>
+          <a:bodyPr wrap="square" anchor="ctr" lIns="0" rIns="0" tIns="0" bIns="0">
+            <a:spAutoFit/>
+          </a:bodyPr>
+          <a:lstStyle/>
+          <a:p>
+            <a:pPr algn="l"/>
+            <a:r>
+              <a:rPr sz="1800" b="1">
+                <a:solidFill>
+                  <a:srgbClr val="0E7A4F"/>
+                </a:solidFill>
+                <a:latin typeface="微软雅黑"/>
+                <a:ea typeface="微软雅黑"/>
+                <a:cs typeface="微软雅黑"/>
+              </a:rPr>
+              <a:t>✓</a:t>
+            </a:r>
+          </a:p>
+        </p:txBody>
+      </p:sp>
+      <p:sp>
+        <p:nvSpPr>
+          <p:cNvPr id="30" name="Rounded Rectangle 29"/>
           <p:cNvSpPr/>
           <p:nvPr/>
         </p:nvSpPr>
@@ -11732,7 +11900,7 @@
       </p:sp>
       <p:sp>
         <p:nvSpPr>
-          <p:cNvPr id="27" name="TextBox 26"/>
+          <p:cNvPr id="31" name="TextBox 30"/>
           <p:cNvSpPr txBox="1"/>
           <p:nvPr/>
         </p:nvSpPr>
@@ -11769,7 +11937,7 @@
       </p:sp>
       <p:sp>
         <p:nvSpPr>
-          <p:cNvPr id="28" name="TextBox 27"/>
+          <p:cNvPr id="32" name="TextBox 31"/>
           <p:cNvSpPr txBox="1"/>
           <p:nvPr/>
         </p:nvSpPr>
@@ -11806,7 +11974,7 @@
       </p:sp>
       <p:sp>
         <p:nvSpPr>
-          <p:cNvPr id="29" name="Rectangle 28"/>
+          <p:cNvPr id="33" name="Rectangle 32"/>
           <p:cNvSpPr/>
           <p:nvPr/>
         </p:nvSpPr>
@@ -11850,7 +12018,7 @@
       </p:sp>
       <p:sp>
         <p:nvSpPr>
-          <p:cNvPr id="30" name="TextBox 29"/>
+          <p:cNvPr id="34" name="TextBox 33"/>
           <p:cNvSpPr txBox="1"/>
           <p:nvPr/>
         </p:nvSpPr>
@@ -12001,7 +12169,7 @@
       </p:sp>
       <p:sp>
         <p:nvSpPr>
-          <p:cNvPr id="31" name="TextBox 30"/>
+          <p:cNvPr id="35" name="TextBox 34"/>
           <p:cNvSpPr txBox="1"/>
           <p:nvPr/>
         </p:nvSpPr>
@@ -12278,7 +12446,7 @@
                 <a:ea typeface="微软雅黑"/>
                 <a:cs typeface="微软雅黑"/>
               </a:rPr>
-              <a:t>20+</a:t>
+              <a:t>27</a:t>
             </a:r>
           </a:p>
         </p:txBody>
@@ -12426,7 +12594,7 @@
                 <a:ea typeface="微软雅黑"/>
                 <a:cs typeface="微软雅黑"/>
               </a:rPr>
-              <a:t>15</a:t>
+              <a:t>20+</a:t>
             </a:r>
           </a:p>
         </p:txBody>
@@ -12500,7 +12668,7 @@
                 <a:ea typeface="微软雅黑"/>
                 <a:cs typeface="微软雅黑"/>
               </a:rPr>
-              <a:t>5</a:t>
+              <a:t>8</a:t>
             </a:r>
           </a:p>
         </p:txBody>
